--- a/Presentation - Software Specification & Design.pptx
+++ b/Presentation - Software Specification & Design.pptx
@@ -341,8 +341,32 @@
           <a:lstStyle/>
           <a:p>
             <a:r>
-              <a:rPr dirty="0"/>
-              <a:t>I will introduce the internship project as an AI-powered enterprise document retrieval system. The main idea is to help users work with large internal documents through secure upload, processing, semantic search, and document-grounded responses. I will keep the presentation focused on software engineering decisions rather than product marketing, and I will explain how the system design connects the requirements, architecture, data model, and implementation choices.</a:t>
+              <a:rPr lang="en-US" dirty="0"/>
+              <a:t>Good morning, everyone.</a:t>
+            </a:r>
+          </a:p>
+          <a:p>
+            <a:r>
+              <a:rPr lang="en-US" dirty="0"/>
+              <a:t>My name is Md Fahim Hossain, and today I will present the software specification and design of the project I developed during my internship at Siemens Energy.</a:t>
+            </a:r>
+          </a:p>
+          <a:p>
+            <a:r>
+              <a:rPr lang="en-US" dirty="0"/>
+              <a:t>The project is an AI-powered enterprise document retrieval system. Its purpose is to help users access information from large collections of organizational documents more efficiently.</a:t>
+            </a:r>
+          </a:p>
+          <a:p>
+            <a:r>
+              <a:rPr lang="en-US" dirty="0"/>
+              <a:t>The system allows users to upload documents, process their contents automatically, and ask questions through a conversational interface. The responses are generated from relevant information retrieved from the selected documents and are shown together with source references.</a:t>
+            </a:r>
+          </a:p>
+          <a:p>
+            <a:r>
+              <a:rPr lang="en-US" dirty="0"/>
+              <a:t>In this presentation, I will focus on the software engineering aspects of the project, especially the requirements, architecture, data model, and important design decisions.</a:t>
             </a:r>
           </a:p>
         </p:txBody>
@@ -419,7 +443,38 @@
           <a:lstStyle/>
           <a:p>
             <a:r>
-              <a:t>To conclude, the project delivered a complete specification and design foundation for an AI-assisted enterprise document retrieval system. The work combined secure document management, automated processing, semantic retrieval, conversation management, and document-grounded response generation. From a software engineering perspective, the most important outcome is the maintainable structure: clear requirements, modular architecture, defined data relationships, and design decisions that support future extension without exposing unnecessary implementation details.</a:t>
+              <a:rPr lang="en-US" dirty="0"/>
+              <a:t>To conclude, the project produced a clear specification and a maintainable design for an enterprise document retrieval system.</a:t>
+            </a:r>
+          </a:p>
+          <a:p>
+            <a:r>
+              <a:rPr lang="en-US" dirty="0"/>
+              <a:t>The requirements, user stories, architectural models, and database design provided a structured foundation for implementation.</a:t>
+            </a:r>
+          </a:p>
+          <a:p>
+            <a:r>
+              <a:rPr lang="en-US" dirty="0"/>
+              <a:t>The system supports secure document management, asynchronous processing, semantic retrieval, conversational question answering, and grounded responses with source references.</a:t>
+            </a:r>
+          </a:p>
+          <a:p>
+            <a:r>
+              <a:rPr lang="en-US" dirty="0"/>
+              <a:t>From a software engineering perspective, the most important outcome was the modular structure of the application.</a:t>
+            </a:r>
+          </a:p>
+          <a:p>
+            <a:r>
+              <a:rPr lang="en-US" dirty="0"/>
+              <a:t>The individual responsibilities are clearly separated, external components are accessed through service boundaries, and long-running tasks are handled in the background.</a:t>
+            </a:r>
+          </a:p>
+          <a:p>
+            <a:r>
+              <a:rPr lang="en-US" dirty="0"/>
+              <a:t>Overall, the project demonstrated how an enterprise knowledge-access problem can be translated into a practical and extensible software architecture.</a:t>
             </a:r>
           </a:p>
         </p:txBody>
@@ -496,7 +551,20 @@
           <a:lstStyle/>
           <a:p>
             <a:r>
-              <a:t>This final slide is intended to leave space for discussion. I would invite questions about the requirements, architecture, model design, or implementation decisions. If asked about details, I would keep the explanation at an appropriate engineering level: Laravel-based MVC application, background processing, PostgreSQL with vector storage, semantic search, conversation management, and document-grounded responses. I would avoid vendor-specific or confidential implementation details and focus on design reasoning.</a:t>
+              <a:rPr lang="en-US" dirty="0"/>
+              <a:t>That concludes my presentation on the software specification and design of the AI-powered enterprise document retrieval system.</a:t>
+            </a:r>
+          </a:p>
+          <a:p>
+            <a:r>
+              <a:rPr lang="en-US" dirty="0"/>
+              <a:t>Thank you very much for your attention.</a:t>
+            </a:r>
+          </a:p>
+          <a:p>
+            <a:r>
+              <a:rPr lang="en-US" dirty="0"/>
+              <a:t>I am happy to answer any questions regarding the requirements, architecture, data model, document-processing workflow, or the design decisions used in the project.</a:t>
             </a:r>
           </a:p>
         </p:txBody>
@@ -573,8 +641,32 @@
           <a:lstStyle/>
           <a:p>
             <a:r>
-              <a:rPr dirty="0"/>
-              <a:t>This agenda follows the required structure for the internship presentation. I start with context, then move into the epic or big story behind the project. After that I describe user stories, requirements, architecture, models, and design decisions. The goal is to make the flow easy to follow: first the problem and stakeholders, then what the system must do, and finally how the software design supports those goals.</a:t>
+              <a:rPr lang="en-US" dirty="0"/>
+              <a:t>I will begin with the company context and my internship role.</a:t>
+            </a:r>
+          </a:p>
+          <a:p>
+            <a:r>
+              <a:rPr lang="en-US" dirty="0"/>
+              <a:t>After that, I will explain the project epic, which describes the main problem and the overall goal of the system.</a:t>
+            </a:r>
+          </a:p>
+          <a:p>
+            <a:r>
+              <a:rPr lang="en-US" dirty="0"/>
+              <a:t>Then I will discuss the user stories and the main functional and non-functional requirements.</a:t>
+            </a:r>
+          </a:p>
+          <a:p>
+            <a:r>
+              <a:rPr lang="en-US" dirty="0"/>
+              <a:t>The second half of the presentation focuses on the system architecture, the use-case and database models, and the architectural decisions used during implementation.</a:t>
+            </a:r>
+          </a:p>
+          <a:p>
+            <a:r>
+              <a:rPr lang="en-US" dirty="0"/>
+              <a:t>Finally, I will summarize the main outcomes of the project.</a:t>
             </a:r>
           </a:p>
         </p:txBody>
@@ -651,7 +743,38 @@
           <a:lstStyle/>
           <a:p>
             <a:r>
-              <a:t>The internship was carried out in an industrial software environment at Siemens Energy, within a department involved in digitalization and process support. My role focused on software engineering work around an enterprise document retrieval system. This included requirement analysis, system design, backend development, interface implementation, and technical documentation. The company context matters because the system needed to fit enterprise expectations around security, maintainability, and reliable access to internal knowledge.</a:t>
+              <a:rPr lang="en-US" dirty="0"/>
+              <a:t>The project was completed at Siemens Energy within the SE GT DG OE department.</a:t>
+            </a:r>
+          </a:p>
+          <a:p>
+            <a:r>
+              <a:rPr lang="en-US" dirty="0"/>
+              <a:t>The department supports digitalization activities and develops solutions that improve internal processes, data accessibility, and operational efficiency.</a:t>
+            </a:r>
+          </a:p>
+          <a:p>
+            <a:r>
+              <a:rPr lang="en-US" dirty="0"/>
+              <a:t>During my internship, I worked in a software engineering and digitalization role. My work covered the main software-development activities, including requirement analysis, system design, backend development, interface implementation, and technical documentation.</a:t>
+            </a:r>
+          </a:p>
+          <a:p>
+            <a:r>
+              <a:rPr lang="en-US" dirty="0"/>
+              <a:t>The project focused on enterprise documents and knowledge retrieval. Organizations often store important information in technical reports, manuals, process descriptions, and operational guidelines.</a:t>
+            </a:r>
+          </a:p>
+          <a:p>
+            <a:r>
+              <a:rPr lang="en-US" dirty="0"/>
+              <a:t>Although this information already exists, finding one specific detail can require significant manual effort. The project therefore aimed to provide a more structured and secure way of accessing this knowledge.</a:t>
+            </a:r>
+          </a:p>
+          <a:p>
+            <a:r>
+              <a:rPr lang="en-US" dirty="0"/>
+              <a:t>Security was also important because users should only be able to access their own documents and conversations, while administrative functionality should remain restricted to authorized roles.</a:t>
             </a:r>
           </a:p>
         </p:txBody>
@@ -728,8 +851,38 @@
           <a:lstStyle/>
           <a:p>
             <a:r>
-              <a:rPr dirty="0"/>
-              <a:t>The epic behind the project is the movement from static document storage to guided knowledge retrieval. In many organizations, useful information exists, but it is distributed across reports, manuals, and technical files. The system addresses that gap by processing documents, creating searchable representations, retrieving relevant sections, and generating responses grounded in those sections. I present this as a software engineering story: clear problem, defined users, and a maintainable technical solution.</a:t>
+              <a:rPr lang="en-US" dirty="0"/>
+              <a:t>This slide presents the epic, or the main story behind the project.</a:t>
+            </a:r>
+          </a:p>
+          <a:p>
+            <a:r>
+              <a:rPr lang="en-US" dirty="0"/>
+              <a:t>The starting problem was the growing number of organizational documents. As the number of files increased, useful knowledge became more difficult to locate through manual browsing or basic keyword search.</a:t>
+            </a:r>
+          </a:p>
+          <a:p>
+            <a:r>
+              <a:rPr lang="en-US" dirty="0"/>
+              <a:t>The next step was to consider how users naturally search for information. Instead of opening several documents and reading them individually, users should be able to ask questions in natural language.</a:t>
+            </a:r>
+          </a:p>
+          <a:p>
+            <a:r>
+              <a:rPr lang="en-US" dirty="0"/>
+              <a:t>The system then retrieves the most relevant parts of the selected documents and uses them as context for generating a response.</a:t>
+            </a:r>
+          </a:p>
+          <a:p>
+            <a:r>
+              <a:rPr lang="en-US" dirty="0"/>
+              <a:t>Finally, the answer is presented together with references to the original document sources, so the user can verify where the information came from.</a:t>
+            </a:r>
+          </a:p>
+          <a:p>
+            <a:r>
+              <a:rPr lang="en-US" dirty="0"/>
+              <a:t>Therefore, the project epic describes the transition from document overload to guided knowledge retrieval. The main objective was to make existing enterprise knowledge easier to find, understand, and verify.</a:t>
             </a:r>
           </a:p>
         </p:txBody>
@@ -806,7 +959,50 @@
           <a:lstStyle/>
           <a:p>
             <a:r>
-              <a:t>The user stories were written in a standard software engineering format: as a role, I want a capability, so that a value is achieved. This helped translate stakeholder needs into implementable features. For normal users, the focus is asking questions across selected documents and receiving referenced answers. For administrators, the focus is controlled access and monitoring. For document owners, the important workflow is upload, processing status, and making documents searchable.</a:t>
+              <a:rPr lang="en-US" dirty="0"/>
+              <a:t>The stakeholder needs were translated into user stories using the common format:</a:t>
+            </a:r>
+          </a:p>
+          <a:p>
+            <a:r>
+              <a:rPr lang="en-US" dirty="0"/>
+              <a:t>“As a role, I want a capability, so that a particular value can be achieved.”</a:t>
+            </a:r>
+          </a:p>
+          <a:p>
+            <a:r>
+              <a:rPr lang="en-US" dirty="0"/>
+              <a:t>This structure helped transform general expectations into clear and implementable software features.</a:t>
+            </a:r>
+          </a:p>
+          <a:p>
+            <a:r>
+              <a:rPr lang="en-US" dirty="0"/>
+              <a:t>For users and knowledge workers, the main need was to ask questions across selected documents and receive responses supported by references.</a:t>
+            </a:r>
+          </a:p>
+          <a:p>
+            <a:r>
+              <a:rPr lang="en-US" dirty="0"/>
+              <a:t>For example, a user wants to select one or more processed documents and ask a natural-language question so that relevant information can be obtained without manually searching every file.</a:t>
+            </a:r>
+          </a:p>
+          <a:p>
+            <a:r>
+              <a:rPr lang="en-US" dirty="0"/>
+              <a:t>Administrators have a different responsibility. They need access to management and monitoring functions so that the system remains secure and reliable.</a:t>
+            </a:r>
+          </a:p>
+          <a:p>
+            <a:r>
+              <a:rPr lang="en-US" dirty="0"/>
+              <a:t>Document-related workflows were also important. Users need to upload documents, monitor their processing status, and know when the documents are ready for use.</a:t>
+            </a:r>
+          </a:p>
+          <a:p>
+            <a:r>
+              <a:rPr lang="en-US" dirty="0"/>
+              <a:t>Each user story included acceptance criteria, which later provided a basis for implementation, testing, and validation.</a:t>
             </a:r>
           </a:p>
         </p:txBody>
@@ -883,7 +1079,56 @@
           <a:lstStyle/>
           <a:p>
             <a:r>
-              <a:t>The requirements combine user-facing functions and quality attributes. Functionally, the system needs authentication, role-based access, document upload, processing, semantic search, conversation management, and response references. Non-functional requirements are equally important in an enterprise setting. Processing should run asynchronously so users are not blocked. The architecture should scale, preserve data isolation, remain reliable, and stay maintainable through clear separation of responsibilities and documentation.</a:t>
+              <a:rPr lang="en-US" dirty="0"/>
+              <a:t>The requirements were divided into functional and non-functional requirements.</a:t>
+            </a:r>
+          </a:p>
+          <a:p>
+            <a:r>
+              <a:rPr lang="en-US" dirty="0"/>
+              <a:t>The functional requirements describe what the system must do.</a:t>
+            </a:r>
+          </a:p>
+          <a:p>
+            <a:r>
+              <a:rPr lang="en-US" dirty="0"/>
+              <a:t>They include secure authentication, role-based access, document upload and management, automated document processing, conversational retrieval, source references, and conversation history.</a:t>
+            </a:r>
+          </a:p>
+          <a:p>
+            <a:r>
+              <a:rPr lang="en-US" dirty="0"/>
+              <a:t>After a document is uploaded, the system processes it automatically and prepares it for semantic retrieval. Once processing is complete, the document can be selected as a knowledge source in a conversation.</a:t>
+            </a:r>
+          </a:p>
+          <a:p>
+            <a:r>
+              <a:rPr lang="en-US" dirty="0"/>
+              <a:t>The non-functional requirements describe how the system should operate.</a:t>
+            </a:r>
+          </a:p>
+          <a:p>
+            <a:r>
+              <a:rPr lang="en-US" dirty="0"/>
+              <a:t>Long-running processing must run asynchronously so that the interface remains responsive. User data must remain isolated, failed documents must not become available for retrieval, and the application structure should remain maintainable.</a:t>
+            </a:r>
+          </a:p>
+          <a:p>
+            <a:r>
+              <a:rPr lang="en-US" dirty="0"/>
+              <a:t>Some requirements were also measurable.</a:t>
+            </a:r>
+          </a:p>
+          <a:p>
+            <a:r>
+              <a:rPr lang="en-US" dirty="0"/>
+              <a:t>Successful uploads should be acknowledged within three seconds. At least ninety percent of questions should receive a response within twenty seconds under normal conditions. The application should also support at least ten concurrent authenticated users without failure or inconsistent data.</a:t>
+            </a:r>
+          </a:p>
+          <a:p>
+            <a:r>
+              <a:rPr lang="en-US" dirty="0"/>
+              <a:t>These measurable requirements later provided clear targets for verification and validation.</a:t>
             </a:r>
           </a:p>
         </p:txBody>
@@ -961,17 +1206,62 @@
           <a:p>
             <a:r>
               <a:rPr lang="en-US" dirty="0"/>
-              <a:t>This slide presents the system’s high-level architecture. Users access the Laravel application through the web interface, with authentication and RBAC protecting documents and conversations. Uploaded documents are processed using Poppler and Tesseract OCR, divided into chunks, converted into embeddings, and stored in PostgreSQL with </a:t>
-            </a:r>
-            <a:r>
-              <a:rPr lang="en-US" dirty="0" err="1"/>
-              <a:t>pgvector</a:t>
-            </a:r>
+              <a:t>This slide presents the high-level architecture of the system.</a:t>
+            </a:r>
+          </a:p>
+          <a:p>
             <a:r>
               <a:rPr lang="en-US" dirty="0"/>
-              <a:t>. When a question is submitted, the Chat Module retrieves the most relevant content from the selected documents and provides it to the language model. The grounded response is returned with source references and saved in the conversation history, ensuring answers remain based on trusted document content.</a:t>
-            </a:r>
-            <a:endParaRPr dirty="0"/>
+              <a:t>Users interact with the application through the web interface. From there, they can authenticate, upload documents, monitor processing, manage conversations, and submit questions.</a:t>
+            </a:r>
+          </a:p>
+          <a:p>
+            <a:r>
+              <a:rPr lang="en-US" dirty="0"/>
+              <a:t>When a document is uploaded, the application first validates and stores the file. The remaining processing stages are then dispatched to background jobs.</a:t>
+            </a:r>
+          </a:p>
+          <a:p>
+            <a:r>
+              <a:rPr lang="en-US" dirty="0"/>
+              <a:t>Text is extracted directly from digital documents. For scanned PDF files, optical character recognition is used.</a:t>
+            </a:r>
+          </a:p>
+          <a:p>
+            <a:r>
+              <a:rPr lang="en-US" dirty="0"/>
+              <a:t>The extracted content is cleaned and divided into smaller semantic chunks. Each chunk is then converted into a vector representation using an embedding model.</a:t>
+            </a:r>
+          </a:p>
+          <a:p>
+            <a:r>
+              <a:rPr lang="en-US" dirty="0"/>
+              <a:t>These vectors are stored together with the document information in PostgreSQL, using vector-search capabilities.</a:t>
+            </a:r>
+          </a:p>
+          <a:p>
+            <a:r>
+              <a:rPr lang="en-US" dirty="0"/>
+              <a:t>When a user asks a question, the retrieval component searches only the selected documents and identifies the most relevant chunks.</a:t>
+            </a:r>
+          </a:p>
+          <a:p>
+            <a:r>
+              <a:rPr lang="en-US" dirty="0"/>
+              <a:t>These chunks are provided as context for response generation. The final response is returned to the user with source references and stored in the conversation history.</a:t>
+            </a:r>
+          </a:p>
+          <a:p>
+            <a:r>
+              <a:rPr lang="en-US" dirty="0"/>
+              <a:t>The main design benefit of this architecture is separation of responsibilities. The web interface, document processing, semantic retrieval, data storage, and response generation remain independent from one another.</a:t>
+            </a:r>
+          </a:p>
+          <a:p>
+            <a:r>
+              <a:rPr lang="en-US" dirty="0"/>
+              <a:t>This makes the system easier to maintain, test, and extend.</a:t>
+            </a:r>
           </a:p>
         </p:txBody>
       </p:sp>
@@ -1047,8 +1337,64 @@
           <a:lstStyle/>
           <a:p>
             <a:r>
-              <a:rPr dirty="0"/>
-              <a:t>The structure slide connects three views of the same system. The use case diagram summarizes the actors and interactions, such as uploading documents, monitoring processing, asking questions, and viewing references. The ER diagram shows how users, documents, chunks, conversations, messages, and usage logs are stored. The implementation stack is Laravel with PHP, PostgreSQL with vector storage, JavaScript for interface behavior, and an OCR-enabled document processing pipeline.</a:t>
+              <a:rPr lang="en-US" dirty="0"/>
+              <a:t>This slide connects the </a:t>
+            </a:r>
+            <a:r>
+              <a:rPr lang="en-US" dirty="0" err="1"/>
+              <a:t>behavioural</a:t>
+            </a:r>
+            <a:r>
+              <a:rPr lang="en-US" dirty="0"/>
+              <a:t> and structural views of the system.</a:t>
+            </a:r>
+          </a:p>
+          <a:p>
+            <a:r>
+              <a:rPr lang="en-US" dirty="0"/>
+              <a:t>On the left, the use-case diagram shows how users and administrators interact with the application.</a:t>
+            </a:r>
+          </a:p>
+          <a:p>
+            <a:r>
+              <a:rPr lang="en-US" dirty="0"/>
+              <a:t>The main user interactions include logging in, uploading and managing documents, monitoring document processing, starting conversations, asking questions, querying multiple documents, viewing references, and reopening previous conversations.</a:t>
+            </a:r>
+          </a:p>
+          <a:p>
+            <a:r>
+              <a:rPr lang="en-US" dirty="0"/>
+              <a:t>Administrators have additional access to system-management and monitoring functions.</a:t>
+            </a:r>
+          </a:p>
+          <a:p>
+            <a:r>
+              <a:rPr lang="en-US" dirty="0"/>
+              <a:t>On the right, the database model shows how the required information is stored.</a:t>
+            </a:r>
+          </a:p>
+          <a:p>
+            <a:r>
+              <a:rPr lang="en-US" dirty="0"/>
+              <a:t>Users are connected to their documents and conversations. Documents contain metadata and processing status. The extracted content is stored as document chunks, together with the information required for retrieval and references.</a:t>
+            </a:r>
+          </a:p>
+          <a:p>
+            <a:r>
+              <a:rPr lang="en-US" dirty="0"/>
+              <a:t>Conversations are connected to one or more selected documents, while messages store the questions and generated responses.</a:t>
+            </a:r>
+          </a:p>
+          <a:p>
+            <a:r>
+              <a:rPr lang="en-US" dirty="0"/>
+              <a:t>The implementation environment includes PHP 8.4, Laravel 12, PostgreSQL, JavaScript, and an OCR-enabled document-processing pipeline.</a:t>
+            </a:r>
+          </a:p>
+          <a:p>
+            <a:r>
+              <a:rPr lang="en-US" dirty="0"/>
+              <a:t>Together, these models show how user requirements were translated into software structure and persistent data.</a:t>
             </a:r>
           </a:p>
         </p:txBody>
@@ -1125,7 +1471,62 @@
           <a:lstStyle/>
           <a:p>
             <a:r>
-              <a:t>The implementation used Laravel's MVC pattern for the web application, while the design also follows hexagonal thinking around external services. The core application should coordinate workflows without being tightly coupled to document extraction, embedding, retrieval, or response generation details. Background queues were chosen for long-running document processing. PostgreSQL with vector storage supports both relational data and semantic retrieval, while role-based access control protects enterprise documents and conversations.</a:t>
+              <a:rPr lang="en-US" dirty="0"/>
+              <a:t>Several architectural principles guided the implementation.</a:t>
+            </a:r>
+          </a:p>
+          <a:p>
+            <a:r>
+              <a:rPr lang="en-US" dirty="0"/>
+              <a:t>First, the web application follows the Model–View–Controller pattern.</a:t>
+            </a:r>
+          </a:p>
+          <a:p>
+            <a:r>
+              <a:rPr lang="en-US" dirty="0"/>
+              <a:t>Controllers handle incoming requests, validation, and authorization. Models represent the persistent data, while views are responsible for presenting information to the user.</a:t>
+            </a:r>
+          </a:p>
+          <a:p>
+            <a:r>
+              <a:rPr lang="en-US" dirty="0"/>
+              <a:t>Complex business logic was not placed directly inside controllers. Tasks such as document extraction, chunking, embedding generation, semantic retrieval, and response generation were implemented through dedicated services.</a:t>
+            </a:r>
+          </a:p>
+          <a:p>
+            <a:r>
+              <a:rPr lang="en-US" dirty="0"/>
+              <a:t>The design also follows hexagonal architectural principles around external components.</a:t>
+            </a:r>
+          </a:p>
+          <a:p>
+            <a:r>
+              <a:rPr lang="en-US" dirty="0"/>
+              <a:t>The core application coordinates the workflow but does not depend directly on the internal details of document-processing tools, embedding models, or response-generation services.</a:t>
+            </a:r>
+          </a:p>
+          <a:p>
+            <a:r>
+              <a:rPr lang="en-US" dirty="0"/>
+              <a:t>These components are accessed through dedicated service boundaries. This reduces tight coupling and makes them easier to replace or extend.</a:t>
+            </a:r>
+          </a:p>
+          <a:p>
+            <a:r>
+              <a:rPr lang="en-US" dirty="0"/>
+              <a:t>Background queues were used to isolate long-running tasks, allowing document processing to continue without blocking the user interface.</a:t>
+            </a:r>
+          </a:p>
+          <a:p>
+            <a:r>
+              <a:rPr lang="en-US" dirty="0"/>
+              <a:t>Role-based access control was also applied to protect documents, conversations, and administrative functions.</a:t>
+            </a:r>
+          </a:p>
+          <a:p>
+            <a:r>
+              <a:rPr lang="en-US" dirty="0"/>
+              <a:t>Together, these decisions improved maintainability, testability, and separation of responsibilities.</a:t>
             </a:r>
           </a:p>
         </p:txBody>
@@ -10202,7 +10603,7 @@
         </p:nvSpPr>
         <p:spPr>
           <a:xfrm>
-            <a:off x="6457950" y="1466850"/>
+            <a:off x="6269109" y="1466850"/>
             <a:ext cx="4953000" cy="3810000"/>
           </a:xfrm>
           <a:prstGeom prst="roundRect">
@@ -10306,7 +10707,7 @@
         </p:nvSpPr>
         <p:spPr>
           <a:xfrm>
-            <a:off x="6896100" y="1905000"/>
+            <a:off x="6707259" y="1905000"/>
             <a:ext cx="2857500" cy="304800"/>
           </a:xfrm>
           <a:prstGeom prst="rect">
@@ -10836,7 +11237,7 @@
         </p:nvSpPr>
         <p:spPr>
           <a:xfrm>
-            <a:off x="6896100" y="2533650"/>
+            <a:off x="6707259" y="2533650"/>
             <a:ext cx="3638550" cy="457200"/>
           </a:xfrm>
           <a:prstGeom prst="roundRect">
@@ -10882,7 +11283,7 @@
         </p:blipFill>
         <p:spPr>
           <a:xfrm>
-            <a:off x="7048500" y="2647950"/>
+            <a:off x="6859659" y="2647950"/>
             <a:ext cx="228600" cy="228600"/>
           </a:xfrm>
           <a:prstGeom prst="rect">
@@ -10906,7 +11307,7 @@
         </p:nvSpPr>
         <p:spPr>
           <a:xfrm>
-            <a:off x="7372350" y="2609022"/>
+            <a:off x="7183509" y="2609022"/>
             <a:ext cx="3048000" cy="247650"/>
           </a:xfrm>
           <a:prstGeom prst="rect">
@@ -10956,7 +11357,7 @@
         </p:nvSpPr>
         <p:spPr>
           <a:xfrm>
-            <a:off x="6896100" y="3086100"/>
+            <a:off x="6707259" y="3086100"/>
             <a:ext cx="3638550" cy="457200"/>
           </a:xfrm>
           <a:prstGeom prst="roundRect">
@@ -11002,7 +11403,7 @@
         </p:blipFill>
         <p:spPr>
           <a:xfrm>
-            <a:off x="7048500" y="3200400"/>
+            <a:off x="6859659" y="3200400"/>
             <a:ext cx="228600" cy="228600"/>
           </a:xfrm>
           <a:prstGeom prst="rect">
@@ -11026,7 +11427,7 @@
         </p:nvSpPr>
         <p:spPr>
           <a:xfrm>
-            <a:off x="7372350" y="3161472"/>
+            <a:off x="7183509" y="3161472"/>
             <a:ext cx="3048000" cy="247650"/>
           </a:xfrm>
           <a:prstGeom prst="rect">
@@ -11076,7 +11477,7 @@
         </p:nvSpPr>
         <p:spPr>
           <a:xfrm>
-            <a:off x="6896100" y="3638550"/>
+            <a:off x="6707259" y="3638550"/>
             <a:ext cx="3638550" cy="457200"/>
           </a:xfrm>
           <a:prstGeom prst="roundRect">
@@ -11122,7 +11523,7 @@
         </p:blipFill>
         <p:spPr>
           <a:xfrm>
-            <a:off x="7048500" y="3752850"/>
+            <a:off x="6859659" y="3752850"/>
             <a:ext cx="228600" cy="228600"/>
           </a:xfrm>
           <a:prstGeom prst="rect">
@@ -11146,7 +11547,7 @@
         </p:nvSpPr>
         <p:spPr>
           <a:xfrm>
-            <a:off x="7372350" y="3713922"/>
+            <a:off x="7183509" y="3713922"/>
             <a:ext cx="3048000" cy="247650"/>
           </a:xfrm>
           <a:prstGeom prst="rect">
@@ -11196,7 +11597,7 @@
         </p:nvSpPr>
         <p:spPr>
           <a:xfrm>
-            <a:off x="6896100" y="4191000"/>
+            <a:off x="6707259" y="4191000"/>
             <a:ext cx="3638550" cy="457200"/>
           </a:xfrm>
           <a:prstGeom prst="roundRect">
@@ -11242,7 +11643,7 @@
         </p:blipFill>
         <p:spPr>
           <a:xfrm>
-            <a:off x="7048500" y="4305300"/>
+            <a:off x="6859659" y="4305300"/>
             <a:ext cx="228600" cy="228600"/>
           </a:xfrm>
           <a:prstGeom prst="rect">
@@ -11266,7 +11667,7 @@
         </p:nvSpPr>
         <p:spPr>
           <a:xfrm>
-            <a:off x="7372350" y="4266372"/>
+            <a:off x="7183509" y="4266372"/>
             <a:ext cx="3048000" cy="247650"/>
           </a:xfrm>
           <a:prstGeom prst="rect">
@@ -12176,24 +12577,8 @@
               </a:defRPr>
             </a:pPr>
             <a:r>
-              <a:rPr lang="en-US" sz="1275" b="0" dirty="0">
-                <a:solidFill>
-                  <a:srgbClr val="5B6B78"/>
-                </a:solidFill>
-              </a:rPr>
-              <a:t>Poppler &amp; </a:t>
-            </a:r>
-            <a:r>
               <a:rPr lang="en-US" sz="1275" dirty="0"/>
-              <a:t>Tesseract</a:t>
-            </a:r>
-            <a:r>
-              <a:rPr lang="en-US" sz="1275" b="0" dirty="0">
-                <a:solidFill>
-                  <a:srgbClr val="5B6B78"/>
-                </a:solidFill>
-              </a:rPr>
-              <a:t> OCR</a:t>
+              <a:t>Text extraction, OCR and embeddings</a:t>
             </a:r>
             <a:endParaRPr sz="1275" b="0" dirty="0">
               <a:solidFill>
@@ -13394,7 +13779,7 @@
         <p:spPr>
           <a:xfrm>
             <a:off x="1521513" y="5612988"/>
-            <a:ext cx="1219200" cy="247650"/>
+            <a:ext cx="954987" cy="247650"/>
           </a:xfrm>
           <a:prstGeom prst="rect">
             <a:avLst/>
@@ -13430,7 +13815,7 @@
                   <a:srgbClr val="083344"/>
                 </a:solidFill>
               </a:rPr>
-              <a:t> 8.3</a:t>
+              <a:t> 8.4</a:t>
             </a:r>
             <a:endParaRPr sz="1275" b="1" dirty="0">
               <a:solidFill>

--- a/Presentation - Software Specification & Design.pptx
+++ b/Presentation - Software Specification & Design.pptx
@@ -359,14 +359,12 @@
           </a:p>
           <a:p>
             <a:r>
+              <a:rPr lang="en-US"/>
+              <a:t>In </a:t>
+            </a:r>
+            <a:r>
               <a:rPr lang="en-US" dirty="0"/>
-              <a:t>The system allows users to upload documents, process their contents automatically, and ask questions through a conversational interface. The responses are generated from relevant information retrieved from the selected documents and are shown together with source references.</a:t>
-            </a:r>
-          </a:p>
-          <a:p>
-            <a:r>
-              <a:rPr lang="en-US" dirty="0"/>
-              <a:t>In this presentation, I will focus on the software engineering aspects of the project, especially the requirements, architecture, data model, and important design decisions.</a:t>
+              <a:t>this presentation, I will focus on the software engineering aspects of the project, especially the requirements, architecture, data model, and important design decisions.</a:t>
             </a:r>
           </a:p>
         </p:txBody>
@@ -2921,7 +2919,7 @@
         </p:blipFill>
         <p:spPr>
           <a:xfrm>
-            <a:off x="1888435" y="1861789"/>
+            <a:off x="2296996" y="1871517"/>
             <a:ext cx="228600" cy="228600"/>
           </a:xfrm>
           <a:prstGeom prst="rect">
@@ -2945,7 +2943,7 @@
         </p:nvSpPr>
         <p:spPr>
           <a:xfrm>
-            <a:off x="2202346" y="1815274"/>
+            <a:off x="2610907" y="1825002"/>
             <a:ext cx="3219450" cy="247650"/>
           </a:xfrm>
           <a:prstGeom prst="rect">
@@ -3041,7 +3039,7 @@
         </p:blipFill>
         <p:spPr>
           <a:xfrm>
-            <a:off x="6375124" y="1871728"/>
+            <a:off x="6754503" y="1871728"/>
             <a:ext cx="228600" cy="228600"/>
           </a:xfrm>
           <a:prstGeom prst="rect">
@@ -3065,7 +3063,7 @@
         </p:nvSpPr>
         <p:spPr>
           <a:xfrm>
-            <a:off x="6679096" y="1815274"/>
+            <a:off x="7058475" y="1815274"/>
             <a:ext cx="3219450" cy="247650"/>
           </a:xfrm>
           <a:prstGeom prst="rect">
@@ -3161,7 +3159,7 @@
         </p:blipFill>
         <p:spPr>
           <a:xfrm>
-            <a:off x="1888435" y="2776189"/>
+            <a:off x="2374820" y="2785917"/>
             <a:ext cx="228600" cy="228600"/>
           </a:xfrm>
           <a:prstGeom prst="rect">
@@ -3185,7 +3183,7 @@
         </p:nvSpPr>
         <p:spPr>
           <a:xfrm>
-            <a:off x="2202346" y="2729674"/>
+            <a:off x="2688731" y="2739402"/>
             <a:ext cx="3219450" cy="247650"/>
           </a:xfrm>
           <a:prstGeom prst="rect">
@@ -3281,7 +3279,7 @@
         </p:blipFill>
         <p:spPr>
           <a:xfrm>
-            <a:off x="6375124" y="2786128"/>
+            <a:off x="6803141" y="2786128"/>
             <a:ext cx="228600" cy="228600"/>
           </a:xfrm>
           <a:prstGeom prst="rect">
@@ -3305,7 +3303,7 @@
         </p:nvSpPr>
         <p:spPr>
           <a:xfrm>
-            <a:off x="6679096" y="2729674"/>
+            <a:off x="7107113" y="2729674"/>
             <a:ext cx="3219450" cy="247650"/>
           </a:xfrm>
           <a:prstGeom prst="rect">
@@ -3401,7 +3399,7 @@
         </p:blipFill>
         <p:spPr>
           <a:xfrm>
-            <a:off x="4283765" y="3774790"/>
+            <a:off x="4575599" y="3774790"/>
             <a:ext cx="228600" cy="228600"/>
           </a:xfrm>
           <a:prstGeom prst="rect">
@@ -3425,7 +3423,7 @@
         </p:nvSpPr>
         <p:spPr>
           <a:xfrm>
-            <a:off x="4587737" y="3728275"/>
+            <a:off x="4879571" y="3728275"/>
             <a:ext cx="3219450" cy="247650"/>
           </a:xfrm>
           <a:prstGeom prst="rect">
